--- a/templates/PresentacionPlantilla.pptx
+++ b/templates/PresentacionPlantilla.pptx
@@ -118,6 +118,9 @@
           </p15:clr>
         </p15:guide>
       </p15:sldGuideLst>
+    </p:ext>
+    <p:ext uri="{2D200454-40CA-4A62-9FC3-DE9A4176ACB9}">
+      <p15:notesGuideLst xmlns:p15="http://schemas.microsoft.com/office/powerpoint/2012/main"/>
     </p:ext>
   </p:extLst>
 </p:presentation>
